--- a/deep_learning/1_ANN/optimizers-explained/optimizer.pptx
+++ b/deep_learning/1_ANN/optimizers-explained/optimizer.pptx
@@ -227,7 +227,7 @@
           <a:p>
             <a:fld id="{7BAEECA8-D063-486F-AE31-5020270C1449}" type="datetimeFigureOut">
               <a:rPr lang="en-US" smtClean="0"/>
-              <a:t>3/9/2026</a:t>
+              <a:t>4/1/2026</a:t>
             </a:fld>
             <a:endParaRPr lang="en-US"/>
           </a:p>
@@ -404,7 +404,7 @@
           <a:p>
             <a:fld id="{CB233BD1-3BA8-448D-9D08-7846095EA517}" type="datetimeFigureOut">
               <a:rPr lang="en-US" smtClean="0"/>
-              <a:t>3/9/2026</a:t>
+              <a:t>4/1/2026</a:t>
             </a:fld>
             <a:endParaRPr lang="en-US"/>
           </a:p>
@@ -902,7 +902,7 @@
           <a:p>
             <a:fld id="{6383FAE1-13DE-4511-8C1B-C8AFB720664C}" type="datetimeFigureOut">
               <a:rPr lang="en-US" smtClean="0"/>
-              <a:t>3/9/2026</a:t>
+              <a:t>4/1/2026</a:t>
             </a:fld>
             <a:endParaRPr lang="en-US"/>
           </a:p>
@@ -1100,7 +1100,7 @@
           <a:p>
             <a:fld id="{6383FAE1-13DE-4511-8C1B-C8AFB720664C}" type="datetimeFigureOut">
               <a:rPr lang="en-US" smtClean="0"/>
-              <a:t>3/9/2026</a:t>
+              <a:t>4/1/2026</a:t>
             </a:fld>
             <a:endParaRPr lang="en-US"/>
           </a:p>
@@ -1308,7 +1308,7 @@
           <a:p>
             <a:fld id="{6383FAE1-13DE-4511-8C1B-C8AFB720664C}" type="datetimeFigureOut">
               <a:rPr lang="en-US" smtClean="0"/>
-              <a:t>3/9/2026</a:t>
+              <a:t>4/1/2026</a:t>
             </a:fld>
             <a:endParaRPr lang="en-US"/>
           </a:p>
@@ -1506,7 +1506,7 @@
           <a:p>
             <a:fld id="{6383FAE1-13DE-4511-8C1B-C8AFB720664C}" type="datetimeFigureOut">
               <a:rPr lang="en-US" smtClean="0"/>
-              <a:t>3/9/2026</a:t>
+              <a:t>4/1/2026</a:t>
             </a:fld>
             <a:endParaRPr lang="en-US"/>
           </a:p>
@@ -1781,7 +1781,7 @@
           <a:p>
             <a:fld id="{6383FAE1-13DE-4511-8C1B-C8AFB720664C}" type="datetimeFigureOut">
               <a:rPr lang="en-US" smtClean="0"/>
-              <a:t>3/9/2026</a:t>
+              <a:t>4/1/2026</a:t>
             </a:fld>
             <a:endParaRPr lang="en-US"/>
           </a:p>
@@ -2046,7 +2046,7 @@
           <a:p>
             <a:fld id="{6383FAE1-13DE-4511-8C1B-C8AFB720664C}" type="datetimeFigureOut">
               <a:rPr lang="en-US" smtClean="0"/>
-              <a:t>3/9/2026</a:t>
+              <a:t>4/1/2026</a:t>
             </a:fld>
             <a:endParaRPr lang="en-US"/>
           </a:p>
@@ -2458,7 +2458,7 @@
           <a:p>
             <a:fld id="{6383FAE1-13DE-4511-8C1B-C8AFB720664C}" type="datetimeFigureOut">
               <a:rPr lang="en-US" smtClean="0"/>
-              <a:t>3/9/2026</a:t>
+              <a:t>4/1/2026</a:t>
             </a:fld>
             <a:endParaRPr lang="en-US"/>
           </a:p>
@@ -2599,7 +2599,7 @@
           <a:p>
             <a:fld id="{6383FAE1-13DE-4511-8C1B-C8AFB720664C}" type="datetimeFigureOut">
               <a:rPr lang="en-US" smtClean="0"/>
-              <a:t>3/9/2026</a:t>
+              <a:t>4/1/2026</a:t>
             </a:fld>
             <a:endParaRPr lang="en-US"/>
           </a:p>
@@ -2712,7 +2712,7 @@
           <a:p>
             <a:fld id="{6383FAE1-13DE-4511-8C1B-C8AFB720664C}" type="datetimeFigureOut">
               <a:rPr lang="en-US" smtClean="0"/>
-              <a:t>3/9/2026</a:t>
+              <a:t>4/1/2026</a:t>
             </a:fld>
             <a:endParaRPr lang="en-US"/>
           </a:p>
@@ -3023,7 +3023,7 @@
           <a:p>
             <a:fld id="{6383FAE1-13DE-4511-8C1B-C8AFB720664C}" type="datetimeFigureOut">
               <a:rPr lang="en-US" smtClean="0"/>
-              <a:t>3/9/2026</a:t>
+              <a:t>4/1/2026</a:t>
             </a:fld>
             <a:endParaRPr lang="en-US"/>
           </a:p>
@@ -3314,7 +3314,7 @@
           <a:p>
             <a:fld id="{6383FAE1-13DE-4511-8C1B-C8AFB720664C}" type="datetimeFigureOut">
               <a:rPr lang="en-US" smtClean="0"/>
-              <a:t>3/9/2026</a:t>
+              <a:t>4/1/2026</a:t>
             </a:fld>
             <a:endParaRPr lang="en-US"/>
           </a:p>
@@ -3558,7 +3558,7 @@
           <a:p>
             <a:fld id="{6383FAE1-13DE-4511-8C1B-C8AFB720664C}" type="datetimeFigureOut">
               <a:rPr lang="en-US" smtClean="0"/>
-              <a:t>3/9/2026</a:t>
+              <a:t>4/1/2026</a:t>
             </a:fld>
             <a:endParaRPr lang="en-US"/>
           </a:p>
